--- a/CapstoneProject/Presentation.pptx
+++ b/CapstoneProject/Presentation.pptx
@@ -4017,14 +4017,28 @@
                 <a:cs typeface="Times New Roman Bold"/>
                 <a:sym typeface="Times New Roman Bold"/>
               </a:rPr>
-              <a:t>What is Databricks?</a:t>
-            </a:r>
-          </a:p>
-          <a:p>
-            <a:pPr algn="l">
+              <a:t>Why Databricks</a:t>
+            </a:r>
+            <a:r>
+              <a:rPr lang="en-US" sz="3500" b="true">
+                <a:solidFill>
+                  <a:srgbClr val="000000"/>
+                </a:solidFill>
+                <a:latin typeface="Times New Roman Bold"/>
+                <a:ea typeface="Times New Roman Bold"/>
+                <a:cs typeface="Times New Roman Bold"/>
+                <a:sym typeface="Times New Roman Bold"/>
+              </a:rPr>
+              <a:t> Was Used</a:t>
+            </a:r>
+          </a:p>
+          <a:p>
+            <a:pPr algn="l" marL="755651" indent="-377825" lvl="1">
               <a:lnSpc>
                 <a:spcPts val="4900"/>
               </a:lnSpc>
+              <a:buFont typeface="Arial"/>
+              <a:buChar char="•"/>
             </a:pPr>
             <a:r>
               <a:rPr lang="en-US" sz="3500">
@@ -4036,7 +4050,7 @@
                 <a:cs typeface="Times New Roman"/>
                 <a:sym typeface="Times New Roman"/>
               </a:rPr>
-              <a:t> Databricks is a cloud-based data analytics platform built on </a:t>
+              <a:t>Retail datasets con</a:t>
             </a:r>
             <a:r>
               <a:rPr lang="en-US" sz="3500">
@@ -4048,15 +4062,116 @@
                 <a:cs typeface="Times New Roman"/>
                 <a:sym typeface="Times New Roman"/>
               </a:rPr>
-              <a:t>Apache Spark that enables large-scale data processing, transformation, and analytics using distributed computing.</a:t>
-            </a:r>
-          </a:p>
-          <a:p>
-            <a:pPr algn="l">
+              <a:t>tain large volumes of transactional data</a:t>
+            </a:r>
+          </a:p>
+          <a:p>
+            <a:pPr algn="l" marL="755651" indent="-377825" lvl="1">
               <a:lnSpc>
                 <a:spcPts val="4900"/>
               </a:lnSpc>
-            </a:pPr>
+              <a:buFont typeface="Arial"/>
+              <a:buChar char="•"/>
+            </a:pPr>
+            <a:r>
+              <a:rPr lang="en-US" sz="3500">
+                <a:solidFill>
+                  <a:srgbClr val="000000"/>
+                </a:solidFill>
+                <a:latin typeface="Times New Roman"/>
+                <a:ea typeface="Times New Roman"/>
+                <a:cs typeface="Times New Roman"/>
+                <a:sym typeface="Times New Roman"/>
+              </a:rPr>
+              <a:t>Databricks provides scalable processing using Apache Spark</a:t>
+            </a:r>
+          </a:p>
+          <a:p>
+            <a:pPr algn="l" marL="755651" indent="-377825" lvl="1">
+              <a:lnSpc>
+                <a:spcPts val="4900"/>
+              </a:lnSpc>
+              <a:buFont typeface="Arial"/>
+              <a:buChar char="•"/>
+            </a:pPr>
+            <a:r>
+              <a:rPr lang="en-US" sz="3500">
+                <a:solidFill>
+                  <a:srgbClr val="000000"/>
+                </a:solidFill>
+                <a:latin typeface="Times New Roman"/>
+                <a:ea typeface="Times New Roman"/>
+                <a:cs typeface="Times New Roman"/>
+                <a:sym typeface="Times New Roman"/>
+              </a:rPr>
+              <a:t>Supports the Medallion Architecture (Br</a:t>
+            </a:r>
+            <a:r>
+              <a:rPr lang="en-US" sz="3500">
+                <a:solidFill>
+                  <a:srgbClr val="000000"/>
+                </a:solidFill>
+                <a:latin typeface="Times New Roman"/>
+                <a:ea typeface="Times New Roman"/>
+                <a:cs typeface="Times New Roman"/>
+                <a:sym typeface="Times New Roman"/>
+              </a:rPr>
+              <a:t>onze, Silver, Gold)</a:t>
+            </a:r>
+          </a:p>
+          <a:p>
+            <a:pPr algn="l" marL="755651" indent="-377825" lvl="1">
+              <a:lnSpc>
+                <a:spcPts val="4900"/>
+              </a:lnSpc>
+              <a:buFont typeface="Arial"/>
+              <a:buChar char="•"/>
+            </a:pPr>
+            <a:r>
+              <a:rPr lang="en-US" sz="3500">
+                <a:solidFill>
+                  <a:srgbClr val="000000"/>
+                </a:solidFill>
+                <a:latin typeface="Times New Roman"/>
+                <a:ea typeface="Times New Roman"/>
+                <a:cs typeface="Times New Roman"/>
+                <a:sym typeface="Times New Roman"/>
+              </a:rPr>
+              <a:t>E</a:t>
+            </a:r>
+            <a:r>
+              <a:rPr lang="en-US" sz="3500">
+                <a:solidFill>
+                  <a:srgbClr val="000000"/>
+                </a:solidFill>
+                <a:latin typeface="Times New Roman"/>
+                <a:ea typeface="Times New Roman"/>
+                <a:cs typeface="Times New Roman"/>
+                <a:sym typeface="Times New Roman"/>
+              </a:rPr>
+              <a:t>nables reliable data storage using Delta Lake</a:t>
+            </a:r>
+          </a:p>
+          <a:p>
+            <a:pPr algn="l" marL="755651" indent="-377825" lvl="1">
+              <a:lnSpc>
+                <a:spcPts val="4900"/>
+              </a:lnSpc>
+              <a:buFont typeface="Arial"/>
+              <a:buChar char="•"/>
+            </a:pPr>
+            <a:r>
+              <a:rPr lang="en-US" sz="3500">
+                <a:solidFill>
+                  <a:srgbClr val="000000"/>
+                </a:solidFill>
+                <a:latin typeface="Times New Roman"/>
+                <a:ea typeface="Times New Roman"/>
+                <a:cs typeface="Times New Roman"/>
+                <a:sym typeface="Times New Roman"/>
+              </a:rPr>
+              <a:t>Suitable for real-world data engineering use cases</a:t>
+            </a:r>
           </a:p>
           <a:p>
             <a:pPr algn="l">
@@ -4074,7 +4189,7 @@
                 <a:cs typeface="Times New Roman Bold"/>
                 <a:sym typeface="Times New Roman Bold"/>
               </a:rPr>
-              <a:t>Why Databricks is Used </a:t>
+              <a:t>How Databricks Was Used</a:t>
             </a:r>
           </a:p>
           <a:p>
@@ -4095,17 +4210,8 @@
                 <a:cs typeface="Times New Roman"/>
                 <a:sym typeface="Times New Roman"/>
               </a:rPr>
-              <a:t>Provides scalable processing for large retail datasets</a:t>
-            </a:r>
-          </a:p>
-          <a:p>
-            <a:pPr algn="l" marL="755651" indent="-377825" lvl="1">
-              <a:lnSpc>
-                <a:spcPts val="4900"/>
-              </a:lnSpc>
-              <a:buFont typeface="Arial"/>
-              <a:buChar char="•"/>
-            </a:pPr>
+              <a:t>Raw C</a:t>
+            </a:r>
             <a:r>
               <a:rPr lang="en-US" sz="3500">
                 <a:solidFill>
@@ -4116,7 +4222,7 @@
                 <a:cs typeface="Times New Roman"/>
                 <a:sym typeface="Times New Roman"/>
               </a:rPr>
-              <a:t>Supports PySpark and Spark SQL for efficient data transformations</a:t>
+              <a:t>SV files were ingested into the Bronze layer as Delta tables</a:t>
             </a:r>
           </a:p>
           <a:p>
@@ -4137,8 +4243,17 @@
                 <a:cs typeface="Times New Roman"/>
                 <a:sym typeface="Times New Roman"/>
               </a:rPr>
-              <a:t>Enables implementation of the Medallion Architecture (Br</a:t>
-            </a:r>
+              <a:t>Data cleaning, validation, and revenue calculation were performed in the Silver layer</a:t>
+            </a:r>
+          </a:p>
+          <a:p>
+            <a:pPr algn="l" marL="755651" indent="-377825" lvl="1">
+              <a:lnSpc>
+                <a:spcPts val="4900"/>
+              </a:lnSpc>
+              <a:buFont typeface="Arial"/>
+              <a:buChar char="•"/>
+            </a:pPr>
             <a:r>
               <a:rPr lang="en-US" sz="3500">
                 <a:solidFill>
@@ -4149,7 +4264,7 @@
                 <a:cs typeface="Times New Roman"/>
                 <a:sym typeface="Times New Roman"/>
               </a:rPr>
-              <a:t>onze, Silver, Gold)</a:t>
+              <a:t>Business-level aggregations and KPIs were created in the Gold layer</a:t>
             </a:r>
           </a:p>
           <a:p>
@@ -4170,7 +4285,7 @@
                 <a:cs typeface="Times New Roman"/>
                 <a:sym typeface="Times New Roman"/>
               </a:rPr>
-              <a:t>Integrates Delta Lake for reliable and consistent data storage</a:t>
+              <a:t>PySpark and Spark SQL were used for transformations and analytics</a:t>
             </a:r>
           </a:p>
           <a:p>
@@ -4191,26 +4306,7 @@
                 <a:cs typeface="Times New Roman"/>
                 <a:sym typeface="Times New Roman"/>
               </a:rPr>
-              <a:t>Supports interactive notebooks for development and debugging</a:t>
-            </a:r>
-          </a:p>
-          <a:p>
-            <a:pPr algn="l">
-              <a:lnSpc>
-                <a:spcPts val="4900"/>
-              </a:lnSpc>
-            </a:pPr>
-            <a:r>
-              <a:rPr lang="en-US" sz="3500">
-                <a:solidFill>
-                  <a:srgbClr val="000000"/>
-                </a:solidFill>
-                <a:latin typeface="Times New Roman"/>
-                <a:ea typeface="Times New Roman"/>
-                <a:cs typeface="Times New Roman"/>
-                <a:sym typeface="Times New Roman"/>
-              </a:rPr>
-              <a:t>Databricks helps efficiently transform raw retail data into analytics-ready datasets for reporting and decision-making.</a:t>
+              <a:t>Gold tables were stored in the Databricks workspace for reporting</a:t>
             </a:r>
           </a:p>
           <a:p>
@@ -6174,7 +6270,7 @@
         <p:spPr>
           <a:xfrm rot="0">
             <a:off x="1560875" y="2477554"/>
-            <a:ext cx="13832605" cy="4340225"/>
+            <a:ext cx="13832605" cy="7435850"/>
           </a:xfrm>
           <a:prstGeom prst="rect">
             <a:avLst/>
@@ -6186,6 +6282,25 @@
           </a:bodyPr>
           <a:lstStyle/>
           <a:p>
+            <a:pPr algn="l">
+              <a:lnSpc>
+                <a:spcPts val="4900"/>
+              </a:lnSpc>
+            </a:pPr>
+            <a:r>
+              <a:rPr lang="en-US" sz="3500" b="true">
+                <a:solidFill>
+                  <a:srgbClr val="000000"/>
+                </a:solidFill>
+                <a:latin typeface="Times New Roman Bold"/>
+                <a:ea typeface="Times New Roman Bold"/>
+                <a:cs typeface="Times New Roman Bold"/>
+                <a:sym typeface="Times New Roman Bold"/>
+              </a:rPr>
+              <a:t>Why Apache Airflow Was Used</a:t>
+            </a:r>
+          </a:p>
+          <a:p>
             <a:pPr algn="l" marL="755651" indent="-377825" lvl="1">
               <a:lnSpc>
                 <a:spcPts val="4900"/>
@@ -6203,7 +6318,7 @@
                 <a:cs typeface="Times New Roman"/>
                 <a:sym typeface="Times New Roman"/>
               </a:rPr>
-              <a:t>Apache Airflow acts as the workflow orchestration layer for the project</a:t>
+              <a:t>ETL pipelines require controlled execution order</a:t>
             </a:r>
           </a:p>
           <a:p>
@@ -6224,7 +6339,7 @@
                 <a:cs typeface="Times New Roman"/>
                 <a:sym typeface="Times New Roman"/>
               </a:rPr>
-              <a:t>It controls the execution order of ETL stages (Bronze → Silver → Gold)</a:t>
+              <a:t>Manual execution is error-prone and not scalable</a:t>
             </a:r>
           </a:p>
           <a:p>
@@ -6245,8 +6360,17 @@
                 <a:cs typeface="Times New Roman"/>
                 <a:sym typeface="Times New Roman"/>
               </a:rPr>
-              <a:t>Ensur</a:t>
-            </a:r>
+              <a:t>Airflow provides workflow orchestration and automation</a:t>
+            </a:r>
+          </a:p>
+          <a:p>
+            <a:pPr algn="l" marL="755651" indent="-377825" lvl="1">
+              <a:lnSpc>
+                <a:spcPts val="4900"/>
+              </a:lnSpc>
+              <a:buFont typeface="Arial"/>
+              <a:buChar char="•"/>
+            </a:pPr>
             <a:r>
               <a:rPr lang="en-US" sz="3500">
                 <a:solidFill>
@@ -6257,7 +6381,26 @@
                 <a:cs typeface="Times New Roman"/>
                 <a:sym typeface="Times New Roman"/>
               </a:rPr>
-              <a:t>es downstream tasks run only after upstream tasks succeed</a:t>
+              <a:t>Supports retries, monitoring, and logging</a:t>
+            </a:r>
+          </a:p>
+          <a:p>
+            <a:pPr algn="l">
+              <a:lnSpc>
+                <a:spcPts val="4900"/>
+              </a:lnSpc>
+            </a:pPr>
+            <a:r>
+              <a:rPr lang="en-US" sz="3500" b="true">
+                <a:solidFill>
+                  <a:srgbClr val="000000"/>
+                </a:solidFill>
+                <a:latin typeface="Times New Roman Bold"/>
+                <a:ea typeface="Times New Roman Bold"/>
+                <a:cs typeface="Times New Roman Bold"/>
+                <a:sym typeface="Times New Roman Bold"/>
+              </a:rPr>
+              <a:t>How Apache Airflow Was Used</a:t>
             </a:r>
           </a:p>
           <a:p>
@@ -6278,8 +6421,17 @@
                 <a:cs typeface="Times New Roman"/>
                 <a:sym typeface="Times New Roman"/>
               </a:rPr>
-              <a:t>A</a:t>
-            </a:r>
+              <a:t>An Airflow DAG was created to orchestrate the ETL pipeline</a:t>
+            </a:r>
+          </a:p>
+          <a:p>
+            <a:pPr algn="l" marL="755651" indent="-377825" lvl="1">
+              <a:lnSpc>
+                <a:spcPts val="4900"/>
+              </a:lnSpc>
+              <a:buFont typeface="Arial"/>
+              <a:buChar char="•"/>
+            </a:pPr>
             <a:r>
               <a:rPr lang="en-US" sz="3500">
                 <a:solidFill>
@@ -6290,7 +6442,7 @@
                 <a:cs typeface="Times New Roman"/>
                 <a:sym typeface="Times New Roman"/>
               </a:rPr>
-              <a:t>utomatically retries failed tasks to handle temporary issues</a:t>
+              <a:t>Tasks were defined for Bronze, Silver, and Gold layers</a:t>
             </a:r>
           </a:p>
           <a:p>
@@ -6311,7 +6463,7 @@
                 <a:cs typeface="Times New Roman"/>
                 <a:sym typeface="Times New Roman"/>
               </a:rPr>
-              <a:t>Provides centralized monitoring and logging for the entire pipeline</a:t>
+              <a:t>Task dependencies enforced the order: Bronze → Silver → Gold</a:t>
             </a:r>
           </a:p>
           <a:p>
@@ -6332,8 +6484,17 @@
                 <a:cs typeface="Times New Roman"/>
                 <a:sym typeface="Times New Roman"/>
               </a:rPr>
-              <a:t>Improv</a:t>
-            </a:r>
+              <a:t>Retry logic handled temporary failures</a:t>
+            </a:r>
+          </a:p>
+          <a:p>
+            <a:pPr algn="l" marL="755651" indent="-377825" lvl="1">
+              <a:lnSpc>
+                <a:spcPts val="4900"/>
+              </a:lnSpc>
+              <a:buFont typeface="Arial"/>
+              <a:buChar char="•"/>
+            </a:pPr>
             <a:r>
               <a:rPr lang="en-US" sz="3500">
                 <a:solidFill>
@@ -6344,67 +6505,7 @@
                 <a:cs typeface="Times New Roman"/>
                 <a:sym typeface="Times New Roman"/>
               </a:rPr>
-              <a:t>es</a:t>
-            </a:r>
-            <a:r>
-              <a:rPr lang="en-US" sz="3500">
-                <a:solidFill>
-                  <a:srgbClr val="000000"/>
-                </a:solidFill>
-                <a:latin typeface="Times New Roman"/>
-                <a:ea typeface="Times New Roman"/>
-                <a:cs typeface="Times New Roman"/>
-                <a:sym typeface="Times New Roman"/>
-              </a:rPr>
-              <a:t> re</a:t>
-            </a:r>
-            <a:r>
-              <a:rPr lang="en-US" sz="3500">
-                <a:solidFill>
-                  <a:srgbClr val="000000"/>
-                </a:solidFill>
-                <a:latin typeface="Times New Roman"/>
-                <a:ea typeface="Times New Roman"/>
-                <a:cs typeface="Times New Roman"/>
-                <a:sym typeface="Times New Roman"/>
-              </a:rPr>
-              <a:t>l</a:t>
-            </a:r>
-            <a:r>
-              <a:rPr lang="en-US" sz="3500">
-                <a:solidFill>
-                  <a:srgbClr val="000000"/>
-                </a:solidFill>
-                <a:latin typeface="Times New Roman"/>
-                <a:ea typeface="Times New Roman"/>
-                <a:cs typeface="Times New Roman"/>
-                <a:sym typeface="Times New Roman"/>
-              </a:rPr>
-              <a:t>iabili</a:t>
-            </a:r>
-            <a:r>
-              <a:rPr lang="en-US" sz="3500">
-                <a:solidFill>
-                  <a:srgbClr val="000000"/>
-                </a:solidFill>
-                <a:latin typeface="Times New Roman"/>
-                <a:ea typeface="Times New Roman"/>
-                <a:cs typeface="Times New Roman"/>
-                <a:sym typeface="Times New Roman"/>
-              </a:rPr>
-              <a:t>t</a:t>
-            </a:r>
-            <a:r>
-              <a:rPr lang="en-US" sz="3500">
-                <a:solidFill>
-                  <a:srgbClr val="000000"/>
-                </a:solidFill>
-                <a:latin typeface="Times New Roman"/>
-                <a:ea typeface="Times New Roman"/>
-                <a:cs typeface="Times New Roman"/>
-                <a:sym typeface="Times New Roman"/>
-              </a:rPr>
-              <a:t>y, maintainability, and automation of data pipelines</a:t>
+              <a:t>Execution logs were monitored through the Airflow UI</a:t>
             </a:r>
           </a:p>
           <a:p>
@@ -6458,7 +6559,7 @@
                 <a:cs typeface="Times New Roman Bold"/>
                 <a:sym typeface="Times New Roman Bold"/>
               </a:rPr>
-              <a:t>ROLE OF APACHE AIRFLOW</a:t>
+              <a:t>APACHE AIRFLOW</a:t>
             </a:r>
           </a:p>
         </p:txBody>
@@ -7091,8 +7192,8 @@
         </p:nvSpPr>
         <p:spPr>
           <a:xfrm rot="0">
-            <a:off x="1028700" y="2571093"/>
-            <a:ext cx="15653277" cy="4959350"/>
+            <a:off x="1028700" y="1713250"/>
+            <a:ext cx="15653277" cy="8674100"/>
           </a:xfrm>
           <a:prstGeom prst="rect">
             <a:avLst/>
@@ -7104,6 +7205,25 @@
           </a:bodyPr>
           <a:lstStyle/>
           <a:p>
+            <a:pPr algn="l">
+              <a:lnSpc>
+                <a:spcPts val="4900"/>
+              </a:lnSpc>
+            </a:pPr>
+            <a:r>
+              <a:rPr lang="en-US" sz="3500" b="true">
+                <a:solidFill>
+                  <a:srgbClr val="000000"/>
+                </a:solidFill>
+                <a:latin typeface="Times New Roman Bold"/>
+                <a:ea typeface="Times New Roman Bold"/>
+                <a:cs typeface="Times New Roman Bold"/>
+                <a:sym typeface="Times New Roman Bold"/>
+              </a:rPr>
+              <a:t>Why Power BI Was Used</a:t>
+            </a:r>
+          </a:p>
+          <a:p>
             <a:pPr algn="l" marL="755651" indent="-377825" lvl="1">
               <a:lnSpc>
                 <a:spcPts val="4900"/>
@@ -7121,7 +7241,7 @@
                 <a:cs typeface="Times New Roman"/>
                 <a:sym typeface="Times New Roman"/>
               </a:rPr>
-              <a:t>Power BI is used as the visualization and reporting layer of the project to convert Gold-layer analytics data into interactive dashboards.</a:t>
+              <a:t>Business stakeholders require visual insights, not raw data</a:t>
             </a:r>
           </a:p>
           <a:p>
@@ -7142,7 +7262,7 @@
                 <a:cs typeface="Times New Roman"/>
                 <a:sym typeface="Times New Roman"/>
               </a:rPr>
-              <a:t>Connects directly to Gold tables for reporting</a:t>
+              <a:t>Power BI supports interactive and user-friendly dashboards</a:t>
             </a:r>
           </a:p>
           <a:p>
@@ -7163,7 +7283,7 @@
                 <a:cs typeface="Times New Roman"/>
                 <a:sym typeface="Times New Roman"/>
               </a:rPr>
-              <a:t>Displays key business KPIs and trends</a:t>
+              <a:t>Integrates well with structured analytics datasets</a:t>
             </a:r>
           </a:p>
           <a:p>
@@ -7184,7 +7304,26 @@
                 <a:cs typeface="Times New Roman"/>
                 <a:sym typeface="Times New Roman"/>
               </a:rPr>
-              <a:t>Supports filters, slicers, and drill-down analysis</a:t>
+              <a:t>Widely used in industry for business reporting</a:t>
+            </a:r>
+          </a:p>
+          <a:p>
+            <a:pPr algn="l">
+              <a:lnSpc>
+                <a:spcPts val="4900"/>
+              </a:lnSpc>
+            </a:pPr>
+            <a:r>
+              <a:rPr lang="en-US" sz="3500" b="true">
+                <a:solidFill>
+                  <a:srgbClr val="000000"/>
+                </a:solidFill>
+                <a:latin typeface="Times New Roman Bold"/>
+                <a:ea typeface="Times New Roman Bold"/>
+                <a:cs typeface="Times New Roman Bold"/>
+                <a:sym typeface="Times New Roman Bold"/>
+              </a:rPr>
+              <a:t>How Power BI Was Used</a:t>
             </a:r>
           </a:p>
           <a:p>
@@ -7205,7 +7344,7 @@
                 <a:cs typeface="Times New Roman"/>
                 <a:sym typeface="Times New Roman"/>
               </a:rPr>
-              <a:t>Enables business users to explore data interactively</a:t>
+              <a:t>Power BI was connected to Gold-layer tables from Databricks</a:t>
             </a:r>
           </a:p>
           <a:p>
@@ -7226,8 +7365,120 @@
                 <a:cs typeface="Times New Roman"/>
                 <a:sym typeface="Times New Roman"/>
               </a:rPr>
-              <a:t>Power BI helps transform processed data into actionable insights for decision-makers.</a:t>
-            </a:r>
+              <a:t>Three dashboards were created:</a:t>
+            </a:r>
+          </a:p>
+          <a:p>
+            <a:pPr algn="l" marL="1511301" indent="-503767" lvl="2">
+              <a:lnSpc>
+                <a:spcPts val="4900"/>
+              </a:lnSpc>
+              <a:buFont typeface="Arial"/>
+              <a:buChar char="⚬"/>
+            </a:pPr>
+            <a:r>
+              <a:rPr lang="en-US" sz="3500">
+                <a:solidFill>
+                  <a:srgbClr val="000000"/>
+                </a:solidFill>
+                <a:latin typeface="Times New Roman"/>
+                <a:ea typeface="Times New Roman"/>
+                <a:cs typeface="Times New Roman"/>
+                <a:sym typeface="Times New Roman"/>
+              </a:rPr>
+              <a:t>Executive Sales Overview</a:t>
+            </a:r>
+          </a:p>
+          <a:p>
+            <a:pPr algn="l" marL="1511301" indent="-503767" lvl="2">
+              <a:lnSpc>
+                <a:spcPts val="4900"/>
+              </a:lnSpc>
+              <a:buFont typeface="Arial"/>
+              <a:buChar char="⚬"/>
+            </a:pPr>
+            <a:r>
+              <a:rPr lang="en-US" sz="3500">
+                <a:solidFill>
+                  <a:srgbClr val="000000"/>
+                </a:solidFill>
+                <a:latin typeface="Times New Roman"/>
+                <a:ea typeface="Times New Roman"/>
+                <a:cs typeface="Times New Roman"/>
+                <a:sym typeface="Times New Roman"/>
+              </a:rPr>
+              <a:t>Regional &amp; Store Performance</a:t>
+            </a:r>
+          </a:p>
+          <a:p>
+            <a:pPr algn="l" marL="1511301" indent="-503767" lvl="2">
+              <a:lnSpc>
+                <a:spcPts val="4900"/>
+              </a:lnSpc>
+              <a:buFont typeface="Arial"/>
+              <a:buChar char="⚬"/>
+            </a:pPr>
+            <a:r>
+              <a:rPr lang="en-US" sz="3500">
+                <a:solidFill>
+                  <a:srgbClr val="000000"/>
+                </a:solidFill>
+                <a:latin typeface="Times New Roman"/>
+                <a:ea typeface="Times New Roman"/>
+                <a:cs typeface="Times New Roman"/>
+                <a:sym typeface="Times New Roman"/>
+              </a:rPr>
+              <a:t>Product &amp; Customer Analytics</a:t>
+            </a:r>
+          </a:p>
+          <a:p>
+            <a:pPr algn="l" marL="755651" indent="-377825" lvl="1">
+              <a:lnSpc>
+                <a:spcPts val="4900"/>
+              </a:lnSpc>
+              <a:buFont typeface="Arial"/>
+              <a:buChar char="•"/>
+            </a:pPr>
+            <a:r>
+              <a:rPr lang="en-US" sz="3500">
+                <a:solidFill>
+                  <a:srgbClr val="000000"/>
+                </a:solidFill>
+                <a:latin typeface="Times New Roman"/>
+                <a:ea typeface="Times New Roman"/>
+                <a:cs typeface="Times New Roman"/>
+                <a:sym typeface="Times New Roman"/>
+              </a:rPr>
+              <a:t>KPIs such as revenue, profit, and target achievement were visualized</a:t>
+            </a:r>
+          </a:p>
+          <a:p>
+            <a:pPr algn="l" marL="755651" indent="-377825" lvl="1">
+              <a:lnSpc>
+                <a:spcPts val="4900"/>
+              </a:lnSpc>
+              <a:buFont typeface="Arial"/>
+              <a:buChar char="•"/>
+            </a:pPr>
+            <a:r>
+              <a:rPr lang="en-US" sz="3500">
+                <a:solidFill>
+                  <a:srgbClr val="000000"/>
+                </a:solidFill>
+                <a:latin typeface="Times New Roman"/>
+                <a:ea typeface="Times New Roman"/>
+                <a:cs typeface="Times New Roman"/>
+                <a:sym typeface="Times New Roman"/>
+              </a:rPr>
+              <a:t>Filters, slicers, and charts enabled interactive data exploration</a:t>
+            </a:r>
+          </a:p>
+          <a:p>
+            <a:pPr algn="l">
+              <a:lnSpc>
+                <a:spcPts val="4900"/>
+              </a:lnSpc>
+            </a:pPr>
           </a:p>
         </p:txBody>
       </p:sp>
@@ -7264,8 +7515,8 @@
         </p:nvSpPr>
         <p:spPr>
           <a:xfrm flipH="false" flipV="false" rot="0">
-            <a:off x="2023789" y="2075928"/>
-            <a:ext cx="14695431" cy="8211072"/>
+            <a:off x="2160763" y="2075928"/>
+            <a:ext cx="13966474" cy="7856142"/>
           </a:xfrm>
           <a:custGeom>
             <a:avLst/>
@@ -7274,18 +7525,18 @@
             <a:cxnLst/>
             <a:rect r="r" b="b" t="t" l="l"/>
             <a:pathLst>
-              <a:path h="8211072" w="14695431">
+              <a:path h="7856142" w="13966474">
                 <a:moveTo>
                   <a:pt x="0" y="0"/>
                 </a:moveTo>
                 <a:lnTo>
-                  <a:pt x="14695431" y="0"/>
+                  <a:pt x="13966474" y="0"/>
                 </a:lnTo>
                 <a:lnTo>
-                  <a:pt x="14695431" y="8211072"/>
+                  <a:pt x="13966474" y="7856142"/>
                 </a:lnTo>
                 <a:lnTo>
-                  <a:pt x="0" y="8211072"/>
+                  <a:pt x="0" y="7856142"/>
                 </a:lnTo>
                 <a:lnTo>
                   <a:pt x="0" y="0"/>
@@ -9007,7 +9258,7 @@
         <p:spPr>
           <a:xfrm rot="0">
             <a:off x="1315448" y="2407432"/>
-            <a:ext cx="13443315" cy="7435850"/>
+            <a:ext cx="16444567" cy="8054975"/>
           </a:xfrm>
           <a:prstGeom prst="rect">
             <a:avLst/>
@@ -9036,17 +9287,8 @@
                 <a:cs typeface="Times New Roman"/>
                 <a:sym typeface="Times New Roman"/>
               </a:rPr>
-              <a:t>Retail sales data is spread across multiple CSV files</a:t>
-            </a:r>
-          </a:p>
-          <a:p>
-            <a:pPr algn="l" marL="755651" indent="-377825" lvl="1">
-              <a:lnSpc>
-                <a:spcPts val="4900"/>
-              </a:lnSpc>
-              <a:buFont typeface="Arial"/>
-              <a:buChar char="•"/>
-            </a:pPr>
+              <a:t>A global r</a:t>
+            </a:r>
             <a:r>
               <a:rPr lang="en-US" sz="3500">
                 <a:solidFill>
@@ -9057,16 +9299,16 @@
                 <a:cs typeface="Times New Roman"/>
                 <a:sym typeface="Times New Roman"/>
               </a:rPr>
-              <a:t>Manual consolidation leads to:</a:t>
-            </a:r>
-          </a:p>
-          <a:p>
-            <a:pPr algn="l" marL="1511301" indent="-503767" lvl="2">
+              <a:t>etail organization generates large volumes of sales, customer, product, and store data across multiple regions and sales channels. This data is often stored in separate files and systems, making it difficult to consolidate, clean, and analyze efficiently.</a:t>
+            </a:r>
+          </a:p>
+          <a:p>
+            <a:pPr algn="l" marL="755651" indent="-377825" lvl="1">
               <a:lnSpc>
                 <a:spcPts val="4900"/>
               </a:lnSpc>
               <a:buFont typeface="Arial"/>
-              <a:buChar char="⚬"/>
+              <a:buChar char="•"/>
             </a:pPr>
             <a:r>
               <a:rPr lang="en-US" sz="3500">
@@ -9078,16 +9320,16 @@
                 <a:cs typeface="Times New Roman"/>
                 <a:sym typeface="Times New Roman"/>
               </a:rPr>
-              <a:t>Errors</a:t>
-            </a:r>
-          </a:p>
-          <a:p>
-            <a:pPr algn="l" marL="1511301" indent="-503767" lvl="2">
+              <a:t>Due to the lack of an automated and centralized analytics system, the organization faces challenges such as inconsistent data quality, delayed reporting, and limited visibility into sales performance, profitability, and customer behavior. As a result, decision-making becomes time-consuming and less reliable.</a:t>
+            </a:r>
+          </a:p>
+          <a:p>
+            <a:pPr algn="l" marL="755651" indent="-377825" lvl="1">
               <a:lnSpc>
                 <a:spcPts val="4900"/>
               </a:lnSpc>
               <a:buFont typeface="Arial"/>
-              <a:buChar char="⚬"/>
+              <a:buChar char="•"/>
             </a:pPr>
             <a:r>
               <a:rPr lang="en-US" sz="3500">
@@ -9099,17 +9341,8 @@
                 <a:cs typeface="Times New Roman"/>
                 <a:sym typeface="Times New Roman"/>
               </a:rPr>
-              <a:t>Delays</a:t>
-            </a:r>
-          </a:p>
-          <a:p>
-            <a:pPr algn="l" marL="1511301" indent="-503767" lvl="2">
-              <a:lnSpc>
-                <a:spcPts val="4900"/>
-              </a:lnSpc>
-              <a:buFont typeface="Arial"/>
-              <a:buChar char="⚬"/>
-            </a:pPr>
+              <a:t>There is a need for an end-to-end data analytics solution that can systematically ing</a:t>
+            </a:r>
             <a:r>
               <a:rPr lang="en-US" sz="3500">
                 <a:solidFill>
@@ -9120,17 +9353,8 @@
                 <a:cs typeface="Times New Roman"/>
                 <a:sym typeface="Times New Roman"/>
               </a:rPr>
-              <a:t>Inconsistent reports</a:t>
-            </a:r>
-          </a:p>
-          <a:p>
-            <a:pPr algn="l" marL="755651" indent="-377825" lvl="1">
-              <a:lnSpc>
-                <a:spcPts val="4900"/>
-              </a:lnSpc>
-              <a:buFont typeface="Arial"/>
-              <a:buChar char="•"/>
-            </a:pPr>
+              <a:t>es</a:t>
+            </a:r>
             <a:r>
               <a:rPr lang="en-US" sz="3500">
                 <a:solidFill>
@@ -9141,17 +9365,8 @@
                 <a:cs typeface="Times New Roman"/>
                 <a:sym typeface="Times New Roman"/>
               </a:rPr>
-              <a:t>No unified view of:</a:t>
-            </a:r>
-          </a:p>
-          <a:p>
-            <a:pPr algn="l" marL="1511301" indent="-503767" lvl="2">
-              <a:lnSpc>
-                <a:spcPts val="4900"/>
-              </a:lnSpc>
-              <a:buFont typeface="Arial"/>
-              <a:buChar char="⚬"/>
-            </a:pPr>
+              <a:t>t raw retai</a:t>
+            </a:r>
             <a:r>
               <a:rPr lang="en-US" sz="3500">
                 <a:solidFill>
@@ -9162,17 +9377,8 @@
                 <a:cs typeface="Times New Roman"/>
                 <a:sym typeface="Times New Roman"/>
               </a:rPr>
-              <a:t>Sales performance</a:t>
-            </a:r>
-          </a:p>
-          <a:p>
-            <a:pPr algn="l" marL="1511301" indent="-503767" lvl="2">
-              <a:lnSpc>
-                <a:spcPts val="4900"/>
-              </a:lnSpc>
-              <a:buFont typeface="Arial"/>
-              <a:buChar char="⚬"/>
-            </a:pPr>
+              <a:t>l</a:t>
+            </a:r>
             <a:r>
               <a:rPr lang="en-US" sz="3500">
                 <a:solidFill>
@@ -9183,17 +9389,8 @@
                 <a:cs typeface="Times New Roman"/>
                 <a:sym typeface="Times New Roman"/>
               </a:rPr>
-              <a:t>Customer behavior</a:t>
-            </a:r>
-          </a:p>
-          <a:p>
-            <a:pPr algn="l" marL="1511301" indent="-503767" lvl="2">
-              <a:lnSpc>
-                <a:spcPts val="4900"/>
-              </a:lnSpc>
-              <a:buFont typeface="Arial"/>
-              <a:buChar char="⚬"/>
-            </a:pPr>
+              <a:t> da</a:t>
+            </a:r>
             <a:r>
               <a:rPr lang="en-US" sz="3500">
                 <a:solidFill>
@@ -9204,34 +9401,8 @@
                 <a:cs typeface="Times New Roman"/>
                 <a:sym typeface="Times New Roman"/>
               </a:rPr>
-              <a:t>Product profitability</a:t>
-            </a:r>
-          </a:p>
-          <a:p>
-            <a:pPr algn="l">
-              <a:lnSpc>
-                <a:spcPts val="4900"/>
-              </a:lnSpc>
-            </a:pPr>
-            <a:r>
-              <a:rPr lang="en-US" sz="3500" b="true">
-                <a:solidFill>
-                  <a:srgbClr val="000000"/>
-                </a:solidFill>
-                <a:latin typeface="Times New Roman Bold"/>
-                <a:ea typeface="Times New Roman Bold"/>
-                <a:cs typeface="Times New Roman Bold"/>
-                <a:sym typeface="Times New Roman Bold"/>
-              </a:rPr>
-              <a:t>Result:</a:t>
-            </a:r>
-          </a:p>
-          <a:p>
-            <a:pPr algn="l">
-              <a:lnSpc>
-                <a:spcPts val="4900"/>
-              </a:lnSpc>
-            </a:pPr>
+              <a:t>t</a:t>
+            </a:r>
             <a:r>
               <a:rPr lang="en-US" sz="3500">
                 <a:solidFill>
@@ -9242,7 +9413,7 @@
                 <a:cs typeface="Times New Roman"/>
                 <a:sym typeface="Times New Roman"/>
               </a:rPr>
-              <a:t> Decision-making is slow and unreliable.</a:t>
+              <a:t>a, perform cleaning and transformation, generate meaningful business insights, and present them through interactive dashboards to support data-driven decision-making.</a:t>
             </a:r>
           </a:p>
           <a:p>
